--- a/decks/geog-economic-world/geog-economic-world_ch6_uk-economy.pptx
+++ b/decks/geog-economic-world/geog-economic-world_ch6_uk-economy.pptx
@@ -127,30 +127,30 @@
   <p:extLst>
     <p:ext uri="{521415D9-36F7-43E2-AB2F-B90AF26B5E84}">
       <p14:sectionLst xmlns:p14="http://schemas.microsoft.com/office/powerpoint/2010/main">
-        <p14:section name="Opening" id="{8dc19006-dd51-ab06-5c8b-2ff9b08cf898}">
+        <p14:section name="Opening" id="{b8cd475c-f1fb-8ab0-4138-254d2ae90552}">
           <p14:sldIdLst>
             <p14:sldId id="256"/>
           </p14:sldIdLst>
         </p14:section>
-        <p14:section name="Gate" id="{ce0914ec-7d25-bb09-91d3-34ace7878d01}">
+        <p14:section name="Gate" id="{4502fa70-c295-139b-700d-391dfe370826}">
           <p14:sldIdLst>
             <p14:sldId id="257"/>
             <p14:sldId id="258"/>
           </p14:sldIdLst>
         </p14:section>
-        <p14:section name="Pre-teach" id="{7e844d7b-bdb1-6825-e65a-8ac193c6b457}">
+        <p14:section name="Pre-teach" id="{f1a19fa4-c8dd-8a0c-ae61-16b7a276403e}">
           <p14:sldIdLst>
             <p14:sldId id="259"/>
             <p14:sldId id="260"/>
           </p14:sldIdLst>
         </p14:section>
-        <p14:section name="Read-along" id="{d69c878f-e1ff-defd-481b-ccab7c9c15bc}">
+        <p14:section name="Read-along" id="{0f2ca4e4-0294-9bc6-31ee-d009888617be}">
           <p14:sldIdLst>
             <p14:sldId id="261"/>
             <p14:sldId id="262"/>
           </p14:sldIdLst>
         </p14:section>
-        <p14:section name="Teach" id="{96253827-f676-b9ba-9ffa-91aafacfcbe5}">
+        <p14:section name="Teach" id="{b5448f1c-7e00-412e-a30e-a4145f856297}">
           <p14:sldIdLst>
             <p14:sldId id="263"/>
             <p14:sldId id="264"/>
@@ -159,7 +159,7 @@
             <p14:sldId id="267"/>
           </p14:sldIdLst>
         </p14:section>
-        <p14:section name="Routes" id="{9d654464-9775-f8bc-fc81-5f194fdd5afb}">
+        <p14:section name="Routes" id="{f44bba29-2b1e-200e-1c66-dc49ae429f33}">
           <p14:sldIdLst>
             <p14:sldId id="268"/>
             <p14:sldId id="269"/>
@@ -167,12 +167,12 @@
             <p14:sldId id="271"/>
           </p14:sldIdLst>
         </p14:section>
-        <p14:section name="Close" id="{76d8d8bf-dbbd-4734-1d02-e469c65e1467}">
+        <p14:section name="Close" id="{e66937f4-aaaa-914b-39ee-f131884d427e}">
           <p14:sldIdLst>
             <p14:sldId id="272"/>
           </p14:sldIdLst>
         </p14:section>
-        <p14:section name="Answers" id="{358a2693-ddd4-19a2-9697-7fe4098f57d0}">
+        <p14:section name="Answers" id="{dd71b425-5e72-b0f7-4b53-e39720c53330}">
           <p14:sldIdLst>
             <p14:sldId id="273"/>
             <p14:sldId id="274"/>
@@ -769,7 +769,7 @@
               <a:rPr lang="en-US" dirty="0"/>
               <a:t>Teach — A post-industrial economy, and industry in the landscape. Say it in your own words, then check understanding with a quick question: ask a pupil from the pre-teach group first, since they met these words and ideas before the lesson. Pupils try to recall before you re-explain.
 A post-industrial economy is a period of growth in an industrialised nation in which the importance of manufacturing falls while services, information and research grow. Its characteristics are a declining manufacturing sector, because of competition from abroad and cheap labour in newly emerging economies and low income countries such as China, Brazil and Bangladesh, where working conditions and environmental laws are relaxed to attract foreign investment; a large services sector, made possible by the internet and digital data sharing, which in the United Kingdom covers scientific research and development, information technology support and banking and financial services; and a growing amount of information technology, leading to an information age in which knowledge and creativity are the core skills, which the United Kingdom can supply because its workforce is highly skilled and educated. Services are now close to 80% of the whole United Kingdom economy.
-Where do service companies work from? Many of them locate in business parks: large areas of office space to rent, usually found on the outskirts of major cities such as London, Edinburgh and Manchester, in what geographers call the urban-rural fringe, where land is cheaper. New business parks are opening nationwide to house the growth of the service industry, and they deliberately put many companies close together so that ideas and information can be shared, which is crucial to how those companies succeed. A science park is a related idea: a collection of scientific and technical knowledge-based businesses on a single site, often beside a university.
+Where do service companies work from? Many of them locate in business parks: large areas of office space to rent, usually sited on the edges of big cities, London, Edinburgh and Manchester among them, in what geographers call the urban-rural fringe, where land is cheaper. New business parks are opening nationwide to house the growth of the service industry, and they deliberately put many companies close together so that ideas and information can be shared, which is crucial to how those companies succeed. A science park is a related idea: a collection of scientific and technical knowledge-based businesses on a single site, often beside a university.
 Industry still touches the physical environment, and Torr Quarry is the case study. It is a limestone quarry in the Mendip Hills, owned by Aggregate Industries, producing 7.5 million tonnes a year. It covers 205 hectares, employs 250 people, generates £15 million a year for the local economy, and moves its limestone out by rail. Large-scale extraction brings serious impacts: air and water pollution as waste products spill into nearby water sources; waste taken to landfill, where it contaminates land and soil; noise and air pollution from the heavy vehicles that carry raw materials in and out; a scarred landscape, with deforestation as soil is stripped to reach the rock beneath and habitats lost as a result; and an eyesore for local people whose view and peace are disturbed. Torr Quarry answers these in five ways: 60 acres of the site have been landscaped to blend into the surroundings, with grass, trees and wildlife lakes for recreation; characteristic limestone features are being created to mimic the natural scenery; limestone travels by rail on the Mendip Rail network rather than by road; strict environmental targets have been set, with regular monitoring of noise, vibration, dust emissions and water quality; and in 2010 a planning decision was taken to deepen the quarry rather than widen it. Across the United Kingdom the same ideas appear as backfilling a worked-out quarry to create a more natural landscape, siting quarries away from large settlements to limit noise and air pollution, planting trees around the edges as a screen so the quarry is not an eyesore, heavy fines for contaminating groundwater or rivers, and assessing a site for ecological importance before planning permission is given, so that habitats and threatened species are preserved.
 Tip: For the Torr Quarry answer, pair each action with the kind of sustainability it serves: landscaping is environmental and social, rail transport is environmental, deepening rather than widening is environmental and economic.</a:t>
             </a:r>
@@ -5293,7 +5293,7 @@
                 <a:ea typeface="Calibri" pitchFamily="34" charset="-122"/>
                 <a:cs typeface="Calibri" pitchFamily="34" charset="-120"/>
               </a:rPr>
-              <a:t>Where do service companies work from? Many of them locate in business parks: large areas of office space to rent, usually found on the outskirts of major cities such as London, Edinburgh and Manchester, in what geographers call the urban-rural fringe, where land is cheaper.</a:t>
+              <a:t>Where do service companies work from? Many of them locate in business parks: large areas of office space to rent, usually sited on the edges of big cities, London, Edinburgh and Manchester among them, in what geographers call the urban-rural fringe, where land is cheaper.</a:t>
             </a:r>
             <a:endParaRPr lang="en-US" sz="2200" dirty="0"/>
           </a:p>
